--- a/classes/parte-8-capstones/230-capstone-2-nlp-o-series-de-tiempo-end-to-end/clase-230-capstone-2-nlp-o-series-de-tiempo-end-to-end-presentacion.pptx
+++ b/classes/parte-8-capstones/230-capstone-2-nlp-o-series-de-tiempo-end-to-end/clase-230-capstone-2-nlp-o-series-de-tiempo-end-to-end-presentacion.pptx
@@ -3272,7 +3272,7 @@
                 </a:solidFill>
                 <a:latin typeface="Segoe UI"/>
               </a:rPr>
-              <a:t>Parte: 8 — Capstones · Fuente: Hyndman &amp; Athanasopoulos, Forecasting: Principles and Practice (3ª ed.) + Hugging Face NLP course.  Duración estimada: 180 min.</a:t>
+              <a:t>Parte: 8 — Capstones · Fuente: Hyndman &amp; Athanasopoulos, Forecasting: Principles and Practice (3ª ed.) + Hugging Face NLP course.  Duración estimada: 180 min. · Nivel: Avanzado</a:t>
             </a:r>
           </a:p>
         </p:txBody>
@@ -3581,7 +3581,7 @@
                 </a:solidFill>
                 <a:latin typeface="Segoe UI"/>
               </a:rPr>
-              <a:t>Parte: 8 — Capstones · Fuente: Hyndman &amp; Athanasopoulos, Forecasting: Principles and Practice (3ª ed.) + Hugging Face NLP course.  Duración estimada: 180 min.</a:t>
+              <a:t>Parte: 8 — Capstones · Fuente: Hyndman &amp; Athanasopoulos, Forecasting: Principles and Practice (3ª ed.) + Hugging Face NLP course.  Duración estimada: 180 min. · Nivel: Avanzado</a:t>
             </a:r>
           </a:p>
         </p:txBody>
